--- a/docs/pptx/Ch14_M5D4_Tradeoffs_Independence.pptx
+++ b/docs/pptx/Ch14_M5D4_Tradeoffs_Independence.pptx
@@ -506,7 +506,11 @@
           <a:p>
             <a:r>
               <a:rPr lang="en-US" dirty="0"/>
-              <a:t/>
+              <a:t>TITRE: Trade-offs &amp;
+Implementation Independence
+Critère: Critère M5 + D4 — Compromis et indépendance
+Objectif de cette présentation : couvrir les concepts clés pour le critère Critère M5 + D4 — Compromis et indépendance.
+Durée estimée : 1h30 à 2h avec exercices.</a:t>
             </a:r>
             <a:endParaRPr lang="en-US" dirty="0"/>
           </a:p>
@@ -594,7 +598,10 @@
           <a:p>
             <a:r>
               <a:rPr lang="en-US" dirty="0"/>
-              <a:t/>
+              <a:t>PROF: Basé sur UNIT_19_04_Tradeoff.pdf.
+Le trade-off est ESSENTIEL en informatique car les ressources sont LIMITÉES.
+Exemple concret : application mobile (peu de RAM) vs serveur (beaucoup de RAM) → pas le même choix d'algorithme.
+Exercice : donner 3 scénarios et demander quel compromis faire.</a:t>
             </a:r>
             <a:endParaRPr lang="en-US" dirty="0"/>
           </a:p>
@@ -682,7 +689,14 @@
           <a:p>
             <a:r>
               <a:rPr lang="en-US" dirty="0"/>
-              <a:t/>
+              <a:t>PROF: Pour chaque exemple, faire un tableau au tableau :
+| Structure | Temps | Espace | Quand l'utiliser |
+|-----------|-------|--------|------------------|
+| ArrayList | get O(1) | compact | lectures fréquentes |
+| LinkedList | add O(1) | pointeurs | insertions fréquentes |
+| HashMap | get O(1) | tableau + buckets | recherche par clé |
+| TreeMap | get O(log n) | arbre | clés triées |
+Site : Monde 4 Ch14 → Balance Trade-off interactive.</a:t>
             </a:r>
             <a:endParaRPr lang="en-US" dirty="0"/>
           </a:p>
@@ -770,7 +784,14 @@
           <a:p>
             <a:r>
               <a:rPr lang="en-US" dirty="0"/>
-              <a:t/>
+              <a:t>PROF: C'est le critère D4 — 3 bénéfices avec exemples.
+Coder en live :
+List&lt;String&gt; noms = new ArrayList&lt;&gt;();
+// Plus tard, on peut changer en :
+List&lt;String&gt; noms = new LinkedList&lt;&gt;();
+// Le reste du code NE CHANGE PAS !
+Demander aux étudiants de trouver 3 bénéfices et les noter au tableau.
+Devoir D4 : rédiger un paragraphe par bénéfice avec un exemple Java.</a:t>
             </a:r>
             <a:endParaRPr lang="en-US" dirty="0"/>
           </a:p>
@@ -858,7 +879,10 @@
           <a:p>
             <a:r>
               <a:rPr lang="en-US" dirty="0"/>
-              <a:t/>
+              <a:t>PROF: Devoir M5/D4 :
+M5 : Expliquer un trade-off avec un exemple concret (structure + complexités)
+D4 : Évaluer 3 bénéfices de l'implementation independence avec des exemples Java
+Site : Monde 4 Ch14 → Balance + Benchmark simulé.</a:t>
             </a:r>
             <a:endParaRPr lang="en-US" dirty="0"/>
           </a:p>
@@ -1213,7 +1237,7 @@
     <p:bg>
       <p:bgPr>
         <a:solidFill>
-          <a:srgbClr val="1B2A4A"/>
+          <a:srgbClr val="1A1500"/>
         </a:solidFill>
       </p:bgPr>
     </p:bg>
@@ -1240,13 +1264,13 @@
         <p:spPr>
           <a:xfrm>
             <a:off x="0" y="0"/>
-            <a:ext cx="9144000" cy="1097280"/>
+            <a:ext cx="9144000" cy="73152"/>
           </a:xfrm>
           <a:prstGeom prst="rect">
             <a:avLst/>
           </a:prstGeom>
           <a:solidFill>
-            <a:srgbClr val="065A82"/>
+            <a:srgbClr val="D97706"/>
           </a:solidFill>
           <a:ln/>
         </p:spPr>
@@ -1259,7 +1283,7 @@
         </p:nvSpPr>
         <p:spPr>
           <a:xfrm>
-            <a:off x="731520" y="137160"/>
+            <a:off x="548640" y="365760"/>
             <a:ext cx="2743200" cy="365760"/>
           </a:xfrm>
           <a:prstGeom prst="rect">
@@ -1276,9 +1300,9 @@
               <a:buNone/>
             </a:pPr>
             <a:r>
-              <a:rPr lang="en-US" sz="1400" b="1" dirty="0">
-                <a:solidFill>
-                  <a:srgbClr val="00A896"/>
+              <a:rPr lang="en-US" sz="1200" b="1" spc="400" kern="0" dirty="0">
+                <a:solidFill>
+                  <a:srgbClr val="D97706"/>
                 </a:solidFill>
                 <a:latin typeface="Calibri" pitchFamily="34" charset="0"/>
                 <a:ea typeface="Calibri" pitchFamily="34" charset="-122"/>
@@ -1286,7 +1310,7 @@
               </a:rPr>
               <a:t>MONDE 4</a:t>
             </a:r>
-            <a:endParaRPr lang="en-US" sz="1400" dirty="0"/>
+            <a:endParaRPr lang="en-US" sz="1200" dirty="0"/>
           </a:p>
         </p:txBody>
       </p:sp>
@@ -1298,8 +1322,8 @@
         </p:nvSpPr>
         <p:spPr>
           <a:xfrm>
-            <a:off x="731520" y="457200"/>
-            <a:ext cx="7315200" cy="457200"/>
+            <a:off x="548640" y="731520"/>
+            <a:ext cx="7315200" cy="365760"/>
           </a:xfrm>
           <a:prstGeom prst="rect">
             <a:avLst/>
@@ -1315,9 +1339,9 @@
               <a:buNone/>
             </a:pPr>
             <a:r>
-              <a:rPr lang="en-US" sz="1200" dirty="0">
-                <a:solidFill>
-                  <a:srgbClr val="E2E8F0"/>
+              <a:rPr lang="en-US" sz="1100" dirty="0">
+                <a:solidFill>
+                  <a:srgbClr val="94A3B8"/>
                 </a:solidFill>
                 <a:latin typeface="Calibri" pitchFamily="34" charset="0"/>
                 <a:ea typeface="Calibri" pitchFamily="34" charset="-122"/>
@@ -1325,7 +1349,7 @@
               </a:rPr>
               <a:t>UNIT 19 : Data Structures &amp; Algorithms</a:t>
             </a:r>
-            <a:endParaRPr lang="en-US" sz="1200" dirty="0"/>
+            <a:endParaRPr lang="en-US" sz="1100" dirty="0"/>
           </a:p>
         </p:txBody>
       </p:sp>
@@ -1337,8 +1361,8 @@
         </p:nvSpPr>
         <p:spPr>
           <a:xfrm>
-            <a:off x="731520" y="1645920"/>
-            <a:ext cx="7315200" cy="640080"/>
+            <a:off x="548640" y="1371600"/>
+            <a:ext cx="8229600" cy="457200"/>
           </a:xfrm>
           <a:prstGeom prst="rect">
             <a:avLst/>
@@ -1354,17 +1378,17 @@
               <a:buNone/>
             </a:pPr>
             <a:r>
-              <a:rPr lang="en-US" sz="4400" b="1" dirty="0">
-                <a:solidFill>
-                  <a:srgbClr val="FFFFFF"/>
-                </a:solidFill>
-                <a:latin typeface="Trebuchet MS" pitchFamily="34" charset="0"/>
-                <a:ea typeface="Trebuchet MS" pitchFamily="34" charset="-122"/>
-                <a:cs typeface="Trebuchet MS" pitchFamily="34" charset="-120"/>
-              </a:rPr>
-              <a:t>Chapitre 14/15</a:t>
-            </a:r>
-            <a:endParaRPr lang="en-US" sz="4400" dirty="0"/>
+              <a:rPr lang="en-US" sz="1400" b="1" dirty="0">
+                <a:solidFill>
+                  <a:srgbClr val="D97706"/>
+                </a:solidFill>
+                <a:latin typeface="Calibri" pitchFamily="34" charset="0"/>
+                <a:ea typeface="Calibri" pitchFamily="34" charset="-122"/>
+                <a:cs typeface="Calibri" pitchFamily="34" charset="-120"/>
+              </a:rPr>
+              <a:t>Chapitre 14</a:t>
+            </a:r>
+            <a:endParaRPr lang="en-US" sz="1400" dirty="0"/>
           </a:p>
         </p:txBody>
       </p:sp>
@@ -1376,8 +1400,8 @@
         </p:nvSpPr>
         <p:spPr>
           <a:xfrm>
-            <a:off x="731520" y="2286000"/>
-            <a:ext cx="7315200" cy="1097280"/>
+            <a:off x="548640" y="2011680"/>
+            <a:ext cx="8229600" cy="1371600"/>
           </a:xfrm>
           <a:prstGeom prst="rect">
             <a:avLst/>
@@ -1393,95 +1417,95 @@
               <a:buNone/>
             </a:pPr>
             <a:r>
-              <a:rPr lang="en-US" sz="3000" b="1" dirty="0">
-                <a:solidFill>
-                  <a:srgbClr val="00A896"/>
-                </a:solidFill>
-                <a:latin typeface="Trebuchet MS" pitchFamily="34" charset="0"/>
-                <a:ea typeface="Trebuchet MS" pitchFamily="34" charset="-122"/>
-                <a:cs typeface="Trebuchet MS" pitchFamily="34" charset="-120"/>
-              </a:rPr>
-              <a:t>Trade-offs et</a:t>
-            </a:r>
-            <a:endParaRPr lang="en-US" sz="3000" dirty="0"/>
+              <a:rPr lang="en-US" sz="3600" b="1" dirty="0">
+                <a:solidFill>
+                  <a:srgbClr val="FFFFFF"/>
+                </a:solidFill>
+                <a:latin typeface="Calibri" pitchFamily="34" charset="0"/>
+                <a:ea typeface="Calibri" pitchFamily="34" charset="-122"/>
+                <a:cs typeface="Calibri" pitchFamily="34" charset="-120"/>
+              </a:rPr>
+              <a:t>Trade-offs &amp;</a:t>
+            </a:r>
+            <a:endParaRPr lang="en-US" sz="3600" dirty="0"/>
           </a:p>
           <a:p>
             <a:pPr indent="0" marL="0">
               <a:buNone/>
             </a:pPr>
             <a:r>
-              <a:rPr lang="en-US" sz="3000" b="1" dirty="0">
-                <a:solidFill>
-                  <a:srgbClr val="00A896"/>
-                </a:solidFill>
-                <a:latin typeface="Trebuchet MS" pitchFamily="34" charset="0"/>
-                <a:ea typeface="Trebuchet MS" pitchFamily="34" charset="-122"/>
-                <a:cs typeface="Trebuchet MS" pitchFamily="34" charset="-120"/>
-              </a:rPr>
-              <a:t>Indépendance d'implémentation</a:t>
-            </a:r>
-            <a:endParaRPr lang="en-US" sz="3000" dirty="0"/>
-          </a:p>
-        </p:txBody>
-      </p:sp>
-      <p:sp>
-        <p:nvSpPr>
-          <p:cNvPr id="7" name="Shape 5"/>
+              <a:rPr lang="en-US" sz="3600" b="1" dirty="0">
+                <a:solidFill>
+                  <a:srgbClr val="FFFFFF"/>
+                </a:solidFill>
+                <a:latin typeface="Calibri" pitchFamily="34" charset="0"/>
+                <a:ea typeface="Calibri" pitchFamily="34" charset="-122"/>
+                <a:cs typeface="Calibri" pitchFamily="34" charset="-120"/>
+              </a:rPr>
+              <a:t>Implementation Independence</a:t>
+            </a:r>
+            <a:endParaRPr lang="en-US" sz="3600" dirty="0"/>
+          </a:p>
+        </p:txBody>
+      </p:sp>
+      <p:sp>
+        <p:nvSpPr>
+          <p:cNvPr id="7" name="Text 5"/>
           <p:cNvSpPr/>
           <p:nvPr/>
         </p:nvSpPr>
         <p:spPr>
           <a:xfrm>
-            <a:off x="731520" y="3657600"/>
-            <a:ext cx="2286000" cy="54864"/>
+            <a:off x="548640" y="3657600"/>
+            <a:ext cx="8229600" cy="365760"/>
+          </a:xfrm>
+          <a:prstGeom prst="rect">
+            <a:avLst/>
+          </a:prstGeom>
+          <a:noFill/>
+          <a:ln/>
+        </p:spPr>
+        <p:txBody>
+          <a:bodyPr wrap="square" rtlCol="0" anchor="ctr"/>
+          <a:lstStyle/>
+          <a:p>
+            <a:pPr indent="0" marL="0">
+              <a:buNone/>
+            </a:pPr>
+            <a:r>
+              <a:rPr lang="en-US" sz="1300" dirty="0">
+                <a:solidFill>
+                  <a:srgbClr val="94A3B8"/>
+                </a:solidFill>
+                <a:latin typeface="Calibri" pitchFamily="34" charset="0"/>
+                <a:ea typeface="Calibri" pitchFamily="34" charset="-122"/>
+                <a:cs typeface="Calibri" pitchFamily="34" charset="-120"/>
+              </a:rPr>
+              <a:t>Critère M5 + D4 — Compromis et indépendance</a:t>
+            </a:r>
+            <a:endParaRPr lang="en-US" sz="1300" dirty="0"/>
+          </a:p>
+        </p:txBody>
+      </p:sp>
+      <p:sp>
+        <p:nvSpPr>
+          <p:cNvPr id="8" name="Shape 6"/>
+          <p:cNvSpPr/>
+          <p:nvPr/>
+        </p:nvSpPr>
+        <p:spPr>
+          <a:xfrm>
+            <a:off x="0" y="5074920"/>
+            <a:ext cx="9144000" cy="73152"/>
           </a:xfrm>
           <a:prstGeom prst="rect">
             <a:avLst/>
           </a:prstGeom>
           <a:solidFill>
-            <a:srgbClr val="F97316"/>
+            <a:srgbClr val="D97706"/>
           </a:solidFill>
           <a:ln/>
         </p:spPr>
-      </p:sp>
-      <p:sp>
-        <p:nvSpPr>
-          <p:cNvPr id="8" name="Text 6"/>
-          <p:cNvSpPr/>
-          <p:nvPr/>
-        </p:nvSpPr>
-        <p:spPr>
-          <a:xfrm>
-            <a:off x="731520" y="3840480"/>
-            <a:ext cx="7315200" cy="731520"/>
-          </a:xfrm>
-          <a:prstGeom prst="rect">
-            <a:avLst/>
-          </a:prstGeom>
-          <a:noFill/>
-          <a:ln/>
-        </p:spPr>
-        <p:txBody>
-          <a:bodyPr wrap="square" rtlCol="0" anchor="ctr"/>
-          <a:lstStyle/>
-          <a:p>
-            <a:pPr indent="0" marL="0">
-              <a:buNone/>
-            </a:pPr>
-            <a:r>
-              <a:rPr lang="en-US" sz="1300" i="1" dirty="0">
-                <a:solidFill>
-                  <a:srgbClr val="E2E8F0"/>
-                </a:solidFill>
-                <a:latin typeface="Calibri" pitchFamily="34" charset="0"/>
-                <a:ea typeface="Calibri" pitchFamily="34" charset="-122"/>
-                <a:cs typeface="Calibri" pitchFamily="34" charset="-120"/>
-              </a:rPr>
-              <a:t>M5/D4</a:t>
-            </a:r>
-            <a:endParaRPr lang="en-US" sz="1300" dirty="0"/>
-          </a:p>
-        </p:txBody>
       </p:sp>
     </p:spTree>
   </p:cSld>
@@ -1497,7 +1521,7 @@
     <p:bg>
       <p:bgPr>
         <a:solidFill>
-          <a:srgbClr val="F8FAFC"/>
+          <a:srgbClr val="1A1500"/>
         </a:solidFill>
       </p:bgPr>
     </p:bg>
@@ -1524,13 +1548,13 @@
         <p:spPr>
           <a:xfrm>
             <a:off x="0" y="0"/>
-            <a:ext cx="109728" cy="5143500"/>
+            <a:ext cx="9144000" cy="54864"/>
           </a:xfrm>
           <a:prstGeom prst="rect">
             <a:avLst/>
           </a:prstGeom>
           <a:solidFill>
-            <a:srgbClr val="F97316"/>
+            <a:srgbClr val="D97706"/>
           </a:solidFill>
           <a:ln/>
         </p:spPr>
@@ -1543,7 +1567,7 @@
         </p:nvSpPr>
         <p:spPr>
           <a:xfrm>
-            <a:off x="457200" y="274320"/>
+            <a:off x="548640" y="274320"/>
             <a:ext cx="8229600" cy="548640"/>
           </a:xfrm>
           <a:prstGeom prst="rect">
@@ -1560,17 +1584,17 @@
               <a:buNone/>
             </a:pPr>
             <a:r>
-              <a:rPr lang="en-US" sz="2600" b="1" dirty="0">
-                <a:solidFill>
-                  <a:srgbClr val="1B2A4A"/>
-                </a:solidFill>
-                <a:latin typeface="Trebuchet MS" pitchFamily="34" charset="0"/>
-                <a:ea typeface="Trebuchet MS" pitchFamily="34" charset="-122"/>
-                <a:cs typeface="Trebuchet MS" pitchFamily="34" charset="-120"/>
-              </a:rPr>
-              <a:t>M5 : Les trade-offs fondamentaux</a:t>
-            </a:r>
-            <a:endParaRPr lang="en-US" sz="2600" dirty="0"/>
+              <a:rPr lang="en-US" sz="2400" b="1" dirty="0">
+                <a:solidFill>
+                  <a:srgbClr val="FFFFFF"/>
+                </a:solidFill>
+                <a:latin typeface="Calibri" pitchFamily="34" charset="0"/>
+                <a:ea typeface="Calibri" pitchFamily="34" charset="-122"/>
+                <a:cs typeface="Calibri" pitchFamily="34" charset="-120"/>
+              </a:rPr>
+              <a:t>Trade-off Temps vs Espace</a:t>
+            </a:r>
+            <a:endParaRPr lang="en-US" sz="2400" dirty="0"/>
           </a:p>
         </p:txBody>
       </p:sp>
@@ -1582,8 +1606,8 @@
         </p:nvSpPr>
         <p:spPr>
           <a:xfrm>
-            <a:off x="640080" y="1005840"/>
-            <a:ext cx="7772400" cy="457200"/>
+            <a:off x="548640" y="1005840"/>
+            <a:ext cx="8046720" cy="3657600"/>
           </a:xfrm>
           <a:prstGeom prst="rect">
             <a:avLst/>
@@ -1592,223 +1616,110 @@
           <a:ln/>
         </p:spPr>
         <p:txBody>
-          <a:bodyPr wrap="square" rtlCol="0" anchor="ctr"/>
+          <a:bodyPr wrap="square" rtlCol="0" anchor="t"/>
           <a:lstStyle/>
           <a:p>
             <a:pPr marL="342900" indent="-342900">
+              <a:lnSpc>
+                <a:spcPct val="130000"/>
+              </a:lnSpc>
               <a:buSzPct val="100000"/>
               <a:buChar char="•"/>
             </a:pPr>
             <a:r>
               <a:rPr lang="en-US" sz="1400" dirty="0">
                 <a:solidFill>
-                  <a:srgbClr val="334155"/>
-                </a:solidFill>
-                <a:latin typeface="Calibri" pitchFamily="34" charset="0"/>
-                <a:ea typeface="Calibri" pitchFamily="34" charset="-122"/>
-                <a:cs typeface="Calibri" pitchFamily="34" charset="-120"/>
-              </a:rPr>
-              <a:t>TEMPS vs ESPACE : cache HashMap (rapide, plus de mémoire) vs recalculer (lent, peu de mémoire)</a:t>
+                  <a:srgbClr val="E2E8F0"/>
+                </a:solidFill>
+                <a:latin typeface="Calibri" pitchFamily="34" charset="0"/>
+                <a:ea typeface="Calibri" pitchFamily="34" charset="-122"/>
+                <a:cs typeface="Calibri" pitchFamily="34" charset="-120"/>
+              </a:rPr>
+              <a:t>Un compromis : optimiser le temps coûte souvent de l'espace (et vice versa)</a:t>
             </a:r>
             <a:endParaRPr lang="en-US" sz="1400" dirty="0"/>
           </a:p>
-        </p:txBody>
-      </p:sp>
-      <p:sp>
-        <p:nvSpPr>
-          <p:cNvPr id="5" name="Text 3"/>
-          <p:cNvSpPr/>
-          <p:nvPr/>
-        </p:nvSpPr>
-        <p:spPr>
-          <a:xfrm>
-            <a:off x="640080" y="1554480"/>
-            <a:ext cx="7772400" cy="457200"/>
-          </a:xfrm>
-          <a:prstGeom prst="rect">
-            <a:avLst/>
-          </a:prstGeom>
-          <a:noFill/>
-          <a:ln/>
-        </p:spPr>
-        <p:txBody>
-          <a:bodyPr wrap="square" rtlCol="0" anchor="ctr"/>
-          <a:lstStyle/>
           <a:p>
             <a:pPr marL="342900" indent="-342900">
+              <a:lnSpc>
+                <a:spcPct val="130000"/>
+              </a:lnSpc>
               <a:buSzPct val="100000"/>
               <a:buChar char="•"/>
             </a:pPr>
             <a:r>
               <a:rPr lang="en-US" sz="1400" dirty="0">
                 <a:solidFill>
-                  <a:srgbClr val="334155"/>
-                </a:solidFill>
-                <a:latin typeface="Calibri" pitchFamily="34" charset="0"/>
-                <a:ea typeface="Calibri" pitchFamily="34" charset="-122"/>
-                <a:cs typeface="Calibri" pitchFamily="34" charset="-120"/>
-              </a:rPr>
-              <a:t>ACCÈS vs INSERTION : ArrayList (accès O(1), insertion O(n)) vs LinkedList (inverse)</a:t>
+                  <a:srgbClr val="E2E8F0"/>
+                </a:solidFill>
+                <a:latin typeface="Calibri" pitchFamily="34" charset="0"/>
+                <a:ea typeface="Calibri" pitchFamily="34" charset="-122"/>
+                <a:cs typeface="Calibri" pitchFamily="34" charset="-120"/>
+              </a:rPr>
+              <a:t>HashMap : plus de mémoire → accès O(1)</a:t>
             </a:r>
             <a:endParaRPr lang="en-US" sz="1400" dirty="0"/>
           </a:p>
-        </p:txBody>
-      </p:sp>
-      <p:sp>
-        <p:nvSpPr>
-          <p:cNvPr id="6" name="Text 4"/>
-          <p:cNvSpPr/>
-          <p:nvPr/>
-        </p:nvSpPr>
-        <p:spPr>
-          <a:xfrm>
-            <a:off x="640080" y="2103120"/>
-            <a:ext cx="7772400" cy="457200"/>
-          </a:xfrm>
-          <a:prstGeom prst="rect">
-            <a:avLst/>
-          </a:prstGeom>
-          <a:noFill/>
-          <a:ln/>
-        </p:spPr>
-        <p:txBody>
-          <a:bodyPr wrap="square" rtlCol="0" anchor="ctr"/>
-          <a:lstStyle/>
           <a:p>
             <a:pPr marL="342900" indent="-342900">
+              <a:lnSpc>
+                <a:spcPct val="130000"/>
+              </a:lnSpc>
               <a:buSzPct val="100000"/>
               <a:buChar char="•"/>
             </a:pPr>
             <a:r>
               <a:rPr lang="en-US" sz="1400" dirty="0">
                 <a:solidFill>
-                  <a:srgbClr val="334155"/>
-                </a:solidFill>
-                <a:latin typeface="Calibri" pitchFamily="34" charset="0"/>
-                <a:ea typeface="Calibri" pitchFamily="34" charset="-122"/>
-                <a:cs typeface="Calibri" pitchFamily="34" charset="-120"/>
-              </a:rPr>
-              <a:t>SIMPLICITÉ vs PERFORMANCE : Bubble Sort (simple, O(n²)) vs Quick Sort (complexe, O(n log n))</a:t>
+                  <a:srgbClr val="E2E8F0"/>
+                </a:solidFill>
+                <a:latin typeface="Calibri" pitchFamily="34" charset="0"/>
+                <a:ea typeface="Calibri" pitchFamily="34" charset="-122"/>
+                <a:cs typeface="Calibri" pitchFamily="34" charset="-120"/>
+              </a:rPr>
+              <a:t>Mémoisation : stocker les résultats → éviter les recalculs</a:t>
             </a:r>
             <a:endParaRPr lang="en-US" sz="1400" dirty="0"/>
           </a:p>
-        </p:txBody>
-      </p:sp>
-      <p:sp>
-        <p:nvSpPr>
-          <p:cNvPr id="7" name="Text 5"/>
-          <p:cNvSpPr/>
-          <p:nvPr/>
-        </p:nvSpPr>
-        <p:spPr>
-          <a:xfrm>
-            <a:off x="640080" y="2651760"/>
-            <a:ext cx="7772400" cy="457200"/>
-          </a:xfrm>
-          <a:prstGeom prst="rect">
-            <a:avLst/>
-          </a:prstGeom>
-          <a:noFill/>
-          <a:ln/>
-        </p:spPr>
-        <p:txBody>
-          <a:bodyPr wrap="square" rtlCol="0" anchor="ctr"/>
-          <a:lstStyle/>
           <a:p>
             <a:pPr marL="342900" indent="-342900">
+              <a:lnSpc>
+                <a:spcPct val="130000"/>
+              </a:lnSpc>
               <a:buSzPct val="100000"/>
               <a:buChar char="•"/>
             </a:pPr>
             <a:r>
               <a:rPr lang="en-US" sz="1400" dirty="0">
                 <a:solidFill>
-                  <a:srgbClr val="334155"/>
-                </a:solidFill>
-                <a:latin typeface="Calibri" pitchFamily="34" charset="0"/>
-                <a:ea typeface="Calibri" pitchFamily="34" charset="-122"/>
-                <a:cs typeface="Calibri" pitchFamily="34" charset="-120"/>
-              </a:rPr>
-              <a:t>ORDRE vs VITESSE : TreeMap (trié, O(log n)) vs HashMap (pas d'ordre, O(1))</a:t>
+                  <a:srgbClr val="E2E8F0"/>
+                </a:solidFill>
+                <a:latin typeface="Calibri" pitchFamily="34" charset="0"/>
+                <a:ea typeface="Calibri" pitchFamily="34" charset="-122"/>
+                <a:cs typeface="Calibri" pitchFamily="34" charset="-120"/>
+              </a:rPr>
+              <a:t>Tri in-place (Quick Sort) : moins de mémoire mais instable</a:t>
             </a:r>
             <a:endParaRPr lang="en-US" sz="1400" dirty="0"/>
           </a:p>
-        </p:txBody>
-      </p:sp>
-      <p:sp>
-        <p:nvSpPr>
-          <p:cNvPr id="8" name="Text 6"/>
-          <p:cNvSpPr/>
-          <p:nvPr/>
-        </p:nvSpPr>
-        <p:spPr>
-          <a:xfrm>
-            <a:off x="640080" y="3200400"/>
-            <a:ext cx="7772400" cy="457200"/>
-          </a:xfrm>
-          <a:prstGeom prst="rect">
-            <a:avLst/>
-          </a:prstGeom>
-          <a:noFill/>
-          <a:ln/>
-        </p:spPr>
-        <p:txBody>
-          <a:bodyPr wrap="square" rtlCol="0" anchor="ctr"/>
-          <a:lstStyle/>
           <a:p>
             <a:pPr marL="342900" indent="-342900">
+              <a:lnSpc>
+                <a:spcPct val="130000"/>
+              </a:lnSpc>
               <a:buSzPct val="100000"/>
               <a:buChar char="•"/>
             </a:pPr>
             <a:r>
               <a:rPr lang="en-US" sz="1400" dirty="0">
                 <a:solidFill>
-                  <a:srgbClr val="334155"/>
-                </a:solidFill>
-                <a:latin typeface="Calibri" pitchFamily="34" charset="0"/>
-                <a:ea typeface="Calibri" pitchFamily="34" charset="-122"/>
-                <a:cs typeface="Calibri" pitchFamily="34" charset="-120"/>
-              </a:rPr>
-              <a:t>FLEXIBILITÉ vs SPÉCIALISATION : List (tout) vs Stack (LIFO uniquement mais optimal)</a:t>
-            </a:r>
-            <a:endParaRPr lang="en-US" sz="1400" dirty="0"/>
-          </a:p>
-        </p:txBody>
-      </p:sp>
-      <p:sp>
-        <p:nvSpPr>
-          <p:cNvPr id="9" name="Text 7"/>
-          <p:cNvSpPr/>
-          <p:nvPr/>
-        </p:nvSpPr>
-        <p:spPr>
-          <a:xfrm>
-            <a:off x="640080" y="3749040"/>
-            <a:ext cx="7772400" cy="457200"/>
-          </a:xfrm>
-          <a:prstGeom prst="rect">
-            <a:avLst/>
-          </a:prstGeom>
-          <a:noFill/>
-          <a:ln/>
-        </p:spPr>
-        <p:txBody>
-          <a:bodyPr wrap="square" rtlCol="0" anchor="ctr"/>
-          <a:lstStyle/>
-          <a:p>
-            <a:pPr marL="342900" indent="-342900">
-              <a:buSzPct val="100000"/>
-              <a:buChar char="•"/>
-            </a:pPr>
-            <a:r>
-              <a:rPr lang="en-US" sz="1400" dirty="0">
-                <a:solidFill>
-                  <a:srgbClr val="334155"/>
-                </a:solidFill>
-                <a:latin typeface="Calibri" pitchFamily="34" charset="0"/>
-                <a:ea typeface="Calibri" pitchFamily="34" charset="-122"/>
-                <a:cs typeface="Calibri" pitchFamily="34" charset="-120"/>
-              </a:rPr>
-              <a:t>Chaque choix d'ADT est un compromis — il faut justifier en fonction du CONTEXTE</a:t>
+                  <a:srgbClr val="E2E8F0"/>
+                </a:solidFill>
+                <a:latin typeface="Calibri" pitchFamily="34" charset="0"/>
+                <a:ea typeface="Calibri" pitchFamily="34" charset="-122"/>
+                <a:cs typeface="Calibri" pitchFamily="34" charset="-120"/>
+              </a:rPr>
+              <a:t>Le meilleur algo = celui qui résout le problème avec les contraintes données</a:t>
             </a:r>
             <a:endParaRPr lang="en-US" sz="1400" dirty="0"/>
           </a:p>
@@ -1828,7 +1739,7 @@
     <p:bg>
       <p:bgPr>
         <a:solidFill>
-          <a:srgbClr val="F8FAFC"/>
+          <a:srgbClr val="1A1500"/>
         </a:solidFill>
       </p:bgPr>
     </p:bg>
@@ -1855,13 +1766,13 @@
         <p:spPr>
           <a:xfrm>
             <a:off x="0" y="0"/>
-            <a:ext cx="109728" cy="5143500"/>
+            <a:ext cx="9144000" cy="54864"/>
           </a:xfrm>
           <a:prstGeom prst="rect">
             <a:avLst/>
           </a:prstGeom>
           <a:solidFill>
-            <a:srgbClr val="F97316"/>
+            <a:srgbClr val="D97706"/>
           </a:solidFill>
           <a:ln/>
         </p:spPr>
@@ -1874,7 +1785,7 @@
         </p:nvSpPr>
         <p:spPr>
           <a:xfrm>
-            <a:off x="457200" y="274320"/>
+            <a:off x="548640" y="274320"/>
             <a:ext cx="8229600" cy="548640"/>
           </a:xfrm>
           <a:prstGeom prst="rect">
@@ -1891,17 +1802,17 @@
               <a:buNone/>
             </a:pPr>
             <a:r>
-              <a:rPr lang="en-US" sz="2600" b="1" dirty="0">
-                <a:solidFill>
-                  <a:srgbClr val="1B2A4A"/>
-                </a:solidFill>
-                <a:latin typeface="Trebuchet MS" pitchFamily="34" charset="0"/>
-                <a:ea typeface="Trebuchet MS" pitchFamily="34" charset="-122"/>
-                <a:cs typeface="Trebuchet MS" pitchFamily="34" charset="-120"/>
-              </a:rPr>
-              <a:t>D4 : 3 avantages de l'indépendance d'implémentation</a:t>
-            </a:r>
-            <a:endParaRPr lang="en-US" sz="2600" dirty="0"/>
+              <a:rPr lang="en-US" sz="2400" b="1" dirty="0">
+                <a:solidFill>
+                  <a:srgbClr val="FFFFFF"/>
+                </a:solidFill>
+                <a:latin typeface="Calibri" pitchFamily="34" charset="0"/>
+                <a:ea typeface="Calibri" pitchFamily="34" charset="-122"/>
+                <a:cs typeface="Calibri" pitchFamily="34" charset="-120"/>
+              </a:rPr>
+              <a:t>Exemples de Trade-offs</a:t>
+            </a:r>
+            <a:endParaRPr lang="en-US" sz="2400" dirty="0"/>
           </a:p>
         </p:txBody>
       </p:sp>
@@ -1913,8 +1824,8 @@
         </p:nvSpPr>
         <p:spPr>
           <a:xfrm>
-            <a:off x="640080" y="1005840"/>
-            <a:ext cx="7772400" cy="457200"/>
+            <a:off x="548640" y="1005840"/>
+            <a:ext cx="8046720" cy="3657600"/>
           </a:xfrm>
           <a:prstGeom prst="rect">
             <a:avLst/>
@@ -1923,223 +1834,110 @@
           <a:ln/>
         </p:spPr>
         <p:txBody>
-          <a:bodyPr wrap="square" rtlCol="0" anchor="ctr"/>
+          <a:bodyPr wrap="square" rtlCol="0" anchor="t"/>
           <a:lstStyle/>
           <a:p>
             <a:pPr marL="342900" indent="-342900">
+              <a:lnSpc>
+                <a:spcPct val="130000"/>
+              </a:lnSpc>
               <a:buSzPct val="100000"/>
               <a:buChar char="•"/>
             </a:pPr>
             <a:r>
               <a:rPr lang="en-US" sz="1400" dirty="0">
                 <a:solidFill>
-                  <a:srgbClr val="334155"/>
-                </a:solidFill>
-                <a:latin typeface="Calibri" pitchFamily="34" charset="0"/>
-                <a:ea typeface="Calibri" pitchFamily="34" charset="-122"/>
-                <a:cs typeface="Calibri" pitchFamily="34" charset="-120"/>
-              </a:rPr>
-              <a:t>AVANTAGE 1 — OPTIMISATION : changer ArrayList→HashMap sans réécrire le code client</a:t>
+                  <a:srgbClr val="E2E8F0"/>
+                </a:solidFill>
+                <a:latin typeface="Calibri" pitchFamily="34" charset="0"/>
+                <a:ea typeface="Calibri" pitchFamily="34" charset="-122"/>
+                <a:cs typeface="Calibri" pitchFamily="34" charset="-120"/>
+              </a:rPr>
+              <a:t>ArrayList vs LinkedList : accès rapide vs insertion rapide</a:t>
             </a:r>
             <a:endParaRPr lang="en-US" sz="1400" dirty="0"/>
           </a:p>
-        </p:txBody>
-      </p:sp>
-      <p:sp>
-        <p:nvSpPr>
-          <p:cNvPr id="5" name="Text 3"/>
-          <p:cNvSpPr/>
-          <p:nvPr/>
-        </p:nvSpPr>
-        <p:spPr>
-          <a:xfrm>
-            <a:off x="640080" y="1554480"/>
-            <a:ext cx="7772400" cy="457200"/>
-          </a:xfrm>
-          <a:prstGeom prst="rect">
-            <a:avLst/>
-          </a:prstGeom>
-          <a:noFill/>
-          <a:ln/>
-        </p:spPr>
-        <p:txBody>
-          <a:bodyPr wrap="square" rtlCol="0" anchor="ctr"/>
-          <a:lstStyle/>
           <a:p>
             <a:pPr marL="342900" indent="-342900">
+              <a:lnSpc>
+                <a:spcPct val="130000"/>
+              </a:lnSpc>
               <a:buSzPct val="100000"/>
               <a:buChar char="•"/>
             </a:pPr>
             <a:r>
               <a:rPr lang="en-US" sz="1400" dirty="0">
                 <a:solidFill>
-                  <a:srgbClr val="334155"/>
-                </a:solidFill>
-                <a:latin typeface="Calibri" pitchFamily="34" charset="0"/>
-                <a:ea typeface="Calibri" pitchFamily="34" charset="-122"/>
-                <a:cs typeface="Calibri" pitchFamily="34" charset="-120"/>
-              </a:rPr>
-              <a:t>  Exemple : passage de O(n) à O(1) pour la recherche, en changeant UNE ligne</a:t>
+                  <a:srgbClr val="E2E8F0"/>
+                </a:solidFill>
+                <a:latin typeface="Calibri" pitchFamily="34" charset="0"/>
+                <a:ea typeface="Calibri" pitchFamily="34" charset="-122"/>
+                <a:cs typeface="Calibri" pitchFamily="34" charset="-120"/>
+              </a:rPr>
+              <a:t>HashMap vs TreeMap : O(1) moyen sans ordre vs O(log n) avec ordre</a:t>
             </a:r>
             <a:endParaRPr lang="en-US" sz="1400" dirty="0"/>
           </a:p>
-        </p:txBody>
-      </p:sp>
-      <p:sp>
-        <p:nvSpPr>
-          <p:cNvPr id="6" name="Text 4"/>
-          <p:cNvSpPr/>
-          <p:nvPr/>
-        </p:nvSpPr>
-        <p:spPr>
-          <a:xfrm>
-            <a:off x="640080" y="2103120"/>
-            <a:ext cx="7772400" cy="457200"/>
-          </a:xfrm>
-          <a:prstGeom prst="rect">
-            <a:avLst/>
-          </a:prstGeom>
-          <a:noFill/>
-          <a:ln/>
-        </p:spPr>
-        <p:txBody>
-          <a:bodyPr wrap="square" rtlCol="0" anchor="ctr"/>
-          <a:lstStyle/>
           <a:p>
             <a:pPr marL="342900" indent="-342900">
+              <a:lnSpc>
+                <a:spcPct val="130000"/>
+              </a:lnSpc>
               <a:buSzPct val="100000"/>
               <a:buChar char="•"/>
             </a:pPr>
             <a:r>
               <a:rPr lang="en-US" sz="1400" dirty="0">
                 <a:solidFill>
-                  <a:srgbClr val="334155"/>
-                </a:solidFill>
-                <a:latin typeface="Calibri" pitchFamily="34" charset="0"/>
-                <a:ea typeface="Calibri" pitchFamily="34" charset="-122"/>
-                <a:cs typeface="Calibri" pitchFamily="34" charset="-120"/>
-              </a:rPr>
-              <a:t>AVANTAGE 2 — TESTABILITÉ : utiliser une implémentation simple pour les tests</a:t>
+                  <a:srgbClr val="E2E8F0"/>
+                </a:solidFill>
+                <a:latin typeface="Calibri" pitchFamily="34" charset="0"/>
+                <a:ea typeface="Calibri" pitchFamily="34" charset="-122"/>
+                <a:cs typeface="Calibri" pitchFamily="34" charset="-120"/>
+              </a:rPr>
+              <a:t>Récursion vs Itération : élégance vs mémoire</a:t>
             </a:r>
             <a:endParaRPr lang="en-US" sz="1400" dirty="0"/>
           </a:p>
-        </p:txBody>
-      </p:sp>
-      <p:sp>
-        <p:nvSpPr>
-          <p:cNvPr id="7" name="Text 5"/>
-          <p:cNvSpPr/>
-          <p:nvPr/>
-        </p:nvSpPr>
-        <p:spPr>
-          <a:xfrm>
-            <a:off x="640080" y="2651760"/>
-            <a:ext cx="7772400" cy="457200"/>
-          </a:xfrm>
-          <a:prstGeom prst="rect">
-            <a:avLst/>
-          </a:prstGeom>
-          <a:noFill/>
-          <a:ln/>
-        </p:spPr>
-        <p:txBody>
-          <a:bodyPr wrap="square" rtlCol="0" anchor="ctr"/>
-          <a:lstStyle/>
           <a:p>
             <a:pPr marL="342900" indent="-342900">
+              <a:lnSpc>
+                <a:spcPct val="130000"/>
+              </a:lnSpc>
               <a:buSzPct val="100000"/>
               <a:buChar char="•"/>
             </a:pPr>
             <a:r>
               <a:rPr lang="en-US" sz="1400" dirty="0">
                 <a:solidFill>
-                  <a:srgbClr val="334155"/>
-                </a:solidFill>
-                <a:latin typeface="Calibri" pitchFamily="34" charset="0"/>
-                <a:ea typeface="Calibri" pitchFamily="34" charset="-122"/>
-                <a:cs typeface="Calibri" pitchFamily="34" charset="-120"/>
-              </a:rPr>
-              <a:t>  Exemple : tester avec ArrayList (simple) puis déployer avec ConcurrentHashMap (thread-safe)</a:t>
+                  <a:srgbClr val="E2E8F0"/>
+                </a:solidFill>
+                <a:latin typeface="Calibri" pitchFamily="34" charset="0"/>
+                <a:ea typeface="Calibri" pitchFamily="34" charset="-122"/>
+                <a:cs typeface="Calibri" pitchFamily="34" charset="-120"/>
+              </a:rPr>
+              <a:t>Cache (mémoisation) : mémoire vs temps</a:t>
             </a:r>
             <a:endParaRPr lang="en-US" sz="1400" dirty="0"/>
           </a:p>
-        </p:txBody>
-      </p:sp>
-      <p:sp>
-        <p:nvSpPr>
-          <p:cNvPr id="8" name="Text 6"/>
-          <p:cNvSpPr/>
-          <p:nvPr/>
-        </p:nvSpPr>
-        <p:spPr>
-          <a:xfrm>
-            <a:off x="640080" y="3200400"/>
-            <a:ext cx="7772400" cy="457200"/>
-          </a:xfrm>
-          <a:prstGeom prst="rect">
-            <a:avLst/>
-          </a:prstGeom>
-          <a:noFill/>
-          <a:ln/>
-        </p:spPr>
-        <p:txBody>
-          <a:bodyPr wrap="square" rtlCol="0" anchor="ctr"/>
-          <a:lstStyle/>
           <a:p>
             <a:pPr marL="342900" indent="-342900">
+              <a:lnSpc>
+                <a:spcPct val="130000"/>
+              </a:lnSpc>
               <a:buSzPct val="100000"/>
               <a:buChar char="•"/>
             </a:pPr>
             <a:r>
               <a:rPr lang="en-US" sz="1400" dirty="0">
                 <a:solidFill>
-                  <a:srgbClr val="334155"/>
-                </a:solidFill>
-                <a:latin typeface="Calibri" pitchFamily="34" charset="0"/>
-                <a:ea typeface="Calibri" pitchFamily="34" charset="-122"/>
-                <a:cs typeface="Calibri" pitchFamily="34" charset="-120"/>
-              </a:rPr>
-              <a:t>AVANTAGE 3 — RÉUTILISABILITÉ : le code écrit pour List&lt;E&gt; fonctionne avec TOUTE implémentation</a:t>
-            </a:r>
-            <a:endParaRPr lang="en-US" sz="1400" dirty="0"/>
-          </a:p>
-        </p:txBody>
-      </p:sp>
-      <p:sp>
-        <p:nvSpPr>
-          <p:cNvPr id="9" name="Text 7"/>
-          <p:cNvSpPr/>
-          <p:nvPr/>
-        </p:nvSpPr>
-        <p:spPr>
-          <a:xfrm>
-            <a:off x="640080" y="3749040"/>
-            <a:ext cx="7772400" cy="457200"/>
-          </a:xfrm>
-          <a:prstGeom prst="rect">
-            <a:avLst/>
-          </a:prstGeom>
-          <a:noFill/>
-          <a:ln/>
-        </p:spPr>
-        <p:txBody>
-          <a:bodyPr wrap="square" rtlCol="0" anchor="ctr"/>
-          <a:lstStyle/>
-          <a:p>
-            <a:pPr marL="342900" indent="-342900">
-              <a:buSzPct val="100000"/>
-              <a:buChar char="•"/>
-            </a:pPr>
-            <a:r>
-              <a:rPr lang="en-US" sz="1400" dirty="0">
-                <a:solidFill>
-                  <a:srgbClr val="334155"/>
-                </a:solidFill>
-                <a:latin typeface="Calibri" pitchFamily="34" charset="0"/>
-                <a:ea typeface="Calibri" pitchFamily="34" charset="-122"/>
-                <a:cs typeface="Calibri" pitchFamily="34" charset="-120"/>
-              </a:rPr>
-              <a:t>  Exemple : un algorithme de tri pour List marche avec ArrayList, LinkedList, ou toute future implémentation</a:t>
+                  <a:srgbClr val="E2E8F0"/>
+                </a:solidFill>
+                <a:latin typeface="Calibri" pitchFamily="34" charset="0"/>
+                <a:ea typeface="Calibri" pitchFamily="34" charset="-122"/>
+                <a:cs typeface="Calibri" pitchFamily="34" charset="-120"/>
+              </a:rPr>
+              <a:t>Compression : espace disque vs temps de décompression</a:t>
             </a:r>
             <a:endParaRPr lang="en-US" sz="1400" dirty="0"/>
           </a:p>
@@ -2159,7 +1957,7 @@
     <p:bg>
       <p:bgPr>
         <a:solidFill>
-          <a:srgbClr val="F8FAFC"/>
+          <a:srgbClr val="1A1500"/>
         </a:solidFill>
       </p:bgPr>
     </p:bg>
@@ -2186,13 +1984,13 @@
         <p:spPr>
           <a:xfrm>
             <a:off x="0" y="0"/>
-            <a:ext cx="109728" cy="5143500"/>
+            <a:ext cx="9144000" cy="54864"/>
           </a:xfrm>
           <a:prstGeom prst="rect">
             <a:avLst/>
           </a:prstGeom>
           <a:solidFill>
-            <a:srgbClr val="F97316"/>
+            <a:srgbClr val="D97706"/>
           </a:solidFill>
           <a:ln/>
         </p:spPr>
@@ -2205,7 +2003,7 @@
         </p:nvSpPr>
         <p:spPr>
           <a:xfrm>
-            <a:off x="457200" y="274320"/>
+            <a:off x="548640" y="274320"/>
             <a:ext cx="8229600" cy="548640"/>
           </a:xfrm>
           <a:prstGeom prst="rect">
@@ -2222,17 +2020,17 @@
               <a:buNone/>
             </a:pPr>
             <a:r>
-              <a:rPr lang="en-US" sz="2600" b="1" dirty="0">
-                <a:solidFill>
-                  <a:srgbClr val="1B2A4A"/>
-                </a:solidFill>
-                <a:latin typeface="Trebuchet MS" pitchFamily="34" charset="0"/>
-                <a:ea typeface="Trebuchet MS" pitchFamily="34" charset="-122"/>
-                <a:cs typeface="Trebuchet MS" pitchFamily="34" charset="-120"/>
-              </a:rPr>
-              <a:t>En Java : interface = indépendance d'implémentation</a:t>
-            </a:r>
-            <a:endParaRPr lang="en-US" sz="2600" dirty="0"/>
+              <a:rPr lang="en-US" sz="2400" b="1" dirty="0">
+                <a:solidFill>
+                  <a:srgbClr val="FFFFFF"/>
+                </a:solidFill>
+                <a:latin typeface="Calibri" pitchFamily="34" charset="0"/>
+                <a:ea typeface="Calibri" pitchFamily="34" charset="-122"/>
+                <a:cs typeface="Calibri" pitchFamily="34" charset="-120"/>
+              </a:rPr>
+              <a:t>D4 : Implementation Independence</a:t>
+            </a:r>
+            <a:endParaRPr lang="en-US" sz="2400" dirty="0"/>
           </a:p>
         </p:txBody>
       </p:sp>
@@ -2244,8 +2042,8 @@
         </p:nvSpPr>
         <p:spPr>
           <a:xfrm>
-            <a:off x="640080" y="1005840"/>
-            <a:ext cx="7772400" cy="457200"/>
+            <a:off x="548640" y="1005840"/>
+            <a:ext cx="8046720" cy="3657600"/>
           </a:xfrm>
           <a:prstGeom prst="rect">
             <a:avLst/>
@@ -2254,223 +2052,131 @@
           <a:ln/>
         </p:spPr>
         <p:txBody>
-          <a:bodyPr wrap="square" rtlCol="0" anchor="ctr"/>
+          <a:bodyPr wrap="square" rtlCol="0" anchor="t"/>
           <a:lstStyle/>
           <a:p>
             <a:pPr marL="342900" indent="-342900">
+              <a:lnSpc>
+                <a:spcPct val="130000"/>
+              </a:lnSpc>
               <a:buSzPct val="100000"/>
               <a:buChar char="•"/>
             </a:pPr>
             <a:r>
               <a:rPr lang="en-US" sz="1400" dirty="0">
                 <a:solidFill>
-                  <a:srgbClr val="334155"/>
-                </a:solidFill>
-                <a:latin typeface="Calibri" pitchFamily="34" charset="0"/>
-                <a:ea typeface="Calibri" pitchFamily="34" charset="-122"/>
-                <a:cs typeface="Calibri" pitchFamily="34" charset="-120"/>
-              </a:rPr>
-              <a:t>List&lt;E&gt; list = new ArrayList&lt;&gt;();  // on peut changer → new LinkedList&lt;&gt;()</a:t>
+                  <a:srgbClr val="E2E8F0"/>
+                </a:solidFill>
+                <a:latin typeface="Calibri" pitchFamily="34" charset="0"/>
+                <a:ea typeface="Calibri" pitchFamily="34" charset="-122"/>
+                <a:cs typeface="Calibri" pitchFamily="34" charset="-120"/>
+              </a:rPr>
+              <a:t>3 bénéfices de l'indépendance d'implémentation :</a:t>
             </a:r>
             <a:endParaRPr lang="en-US" sz="1400" dirty="0"/>
           </a:p>
-        </p:txBody>
-      </p:sp>
-      <p:sp>
-        <p:nvSpPr>
-          <p:cNvPr id="5" name="Text 3"/>
-          <p:cNvSpPr/>
-          <p:nvPr/>
-        </p:nvSpPr>
-        <p:spPr>
-          <a:xfrm>
-            <a:off x="640080" y="1554480"/>
-            <a:ext cx="7772400" cy="457200"/>
-          </a:xfrm>
-          <a:prstGeom prst="rect">
-            <a:avLst/>
-          </a:prstGeom>
-          <a:noFill/>
-          <a:ln/>
-        </p:spPr>
-        <p:txBody>
-          <a:bodyPr wrap="square" rtlCol="0" anchor="ctr"/>
-          <a:lstStyle/>
           <a:p>
             <a:pPr marL="342900" indent="-342900">
+              <a:lnSpc>
+                <a:spcPct val="130000"/>
+              </a:lnSpc>
               <a:buSzPct val="100000"/>
               <a:buChar char="•"/>
             </a:pPr>
             <a:r>
               <a:rPr lang="en-US" sz="1400" dirty="0">
                 <a:solidFill>
-                  <a:srgbClr val="334155"/>
-                </a:solidFill>
-                <a:latin typeface="Calibri" pitchFamily="34" charset="0"/>
-                <a:ea typeface="Calibri" pitchFamily="34" charset="-122"/>
-                <a:cs typeface="Calibri" pitchFamily="34" charset="-120"/>
-              </a:rPr>
-              <a:t>Map&lt;K,V&gt; map = new HashMap&lt;&gt;();   // on peut changer → new TreeMap&lt;&gt;()</a:t>
+                  <a:srgbClr val="E2E8F0"/>
+                </a:solidFill>
+                <a:latin typeface="Calibri" pitchFamily="34" charset="0"/>
+                <a:ea typeface="Calibri" pitchFamily="34" charset="-122"/>
+                <a:cs typeface="Calibri" pitchFamily="34" charset="-120"/>
+              </a:rPr>
+              <a:t>1. Flexibilité : changer l'implémentation sans casser le code client</a:t>
             </a:r>
             <a:endParaRPr lang="en-US" sz="1400" dirty="0"/>
           </a:p>
-        </p:txBody>
-      </p:sp>
-      <p:sp>
-        <p:nvSpPr>
-          <p:cNvPr id="6" name="Text 4"/>
-          <p:cNvSpPr/>
-          <p:nvPr/>
-        </p:nvSpPr>
-        <p:spPr>
-          <a:xfrm>
-            <a:off x="640080" y="2103120"/>
-            <a:ext cx="7772400" cy="457200"/>
-          </a:xfrm>
-          <a:prstGeom prst="rect">
-            <a:avLst/>
-          </a:prstGeom>
-          <a:noFill/>
-          <a:ln/>
-        </p:spPr>
-        <p:txBody>
-          <a:bodyPr wrap="square" rtlCol="0" anchor="ctr"/>
-          <a:lstStyle/>
           <a:p>
             <a:pPr marL="342900" indent="-342900">
+              <a:lnSpc>
+                <a:spcPct val="130000"/>
+              </a:lnSpc>
               <a:buSzPct val="100000"/>
               <a:buChar char="•"/>
             </a:pPr>
             <a:r>
               <a:rPr lang="en-US" sz="1400" dirty="0">
                 <a:solidFill>
-                  <a:srgbClr val="334155"/>
-                </a:solidFill>
-                <a:latin typeface="Calibri" pitchFamily="34" charset="0"/>
-                <a:ea typeface="Calibri" pitchFamily="34" charset="-122"/>
-                <a:cs typeface="Calibri" pitchFamily="34" charset="-120"/>
-              </a:rPr>
-              <a:t>Queue&lt;E&gt; queue = new ArrayDeque&lt;&gt;(); // on peut changer → new LinkedList&lt;&gt;()</a:t>
+                  <a:srgbClr val="E2E8F0"/>
+                </a:solidFill>
+                <a:latin typeface="Calibri" pitchFamily="34" charset="0"/>
+                <a:ea typeface="Calibri" pitchFamily="34" charset="-122"/>
+                <a:cs typeface="Calibri" pitchFamily="34" charset="-120"/>
+              </a:rPr>
+              <a:t>2. Testabilité : tester via l'interface, pas l'implémentation</a:t>
             </a:r>
             <a:endParaRPr lang="en-US" sz="1400" dirty="0"/>
           </a:p>
-        </p:txBody>
-      </p:sp>
-      <p:sp>
-        <p:nvSpPr>
-          <p:cNvPr id="7" name="Text 5"/>
-          <p:cNvSpPr/>
-          <p:nvPr/>
-        </p:nvSpPr>
-        <p:spPr>
-          <a:xfrm>
-            <a:off x="640080" y="2651760"/>
-            <a:ext cx="7772400" cy="457200"/>
-          </a:xfrm>
-          <a:prstGeom prst="rect">
-            <a:avLst/>
-          </a:prstGeom>
-          <a:noFill/>
-          <a:ln/>
-        </p:spPr>
-        <p:txBody>
-          <a:bodyPr wrap="square" rtlCol="0" anchor="ctr"/>
-          <a:lstStyle/>
           <a:p>
             <a:pPr marL="342900" indent="-342900">
+              <a:lnSpc>
+                <a:spcPct val="130000"/>
+              </a:lnSpc>
               <a:buSzPct val="100000"/>
               <a:buChar char="•"/>
             </a:pPr>
             <a:r>
               <a:rPr lang="en-US" sz="1400" dirty="0">
                 <a:solidFill>
-                  <a:srgbClr val="334155"/>
-                </a:solidFill>
-                <a:latin typeface="Calibri" pitchFamily="34" charset="0"/>
-                <a:ea typeface="Calibri" pitchFamily="34" charset="-122"/>
-                <a:cs typeface="Calibri" pitchFamily="34" charset="-120"/>
-              </a:rPr>
-              <a:t>Programmer contre l'INTERFACE, pas contre la CLASSE concrète</a:t>
+                  <a:srgbClr val="E2E8F0"/>
+                </a:solidFill>
+                <a:latin typeface="Calibri" pitchFamily="34" charset="0"/>
+                <a:ea typeface="Calibri" pitchFamily="34" charset="-122"/>
+                <a:cs typeface="Calibri" pitchFamily="34" charset="-120"/>
+              </a:rPr>
+              <a:t>3. Réutilisabilité : le même code client fonctionne avec différentes implémentations</a:t>
             </a:r>
             <a:endParaRPr lang="en-US" sz="1400" dirty="0"/>
           </a:p>
-        </p:txBody>
-      </p:sp>
-      <p:sp>
-        <p:nvSpPr>
-          <p:cNvPr id="8" name="Text 6"/>
-          <p:cNvSpPr/>
-          <p:nvPr/>
-        </p:nvSpPr>
-        <p:spPr>
-          <a:xfrm>
-            <a:off x="640080" y="3200400"/>
-            <a:ext cx="7772400" cy="457200"/>
-          </a:xfrm>
-          <a:prstGeom prst="rect">
-            <a:avLst/>
-          </a:prstGeom>
-          <a:noFill/>
-          <a:ln/>
-        </p:spPr>
-        <p:txBody>
-          <a:bodyPr wrap="square" rtlCol="0" anchor="ctr"/>
-          <a:lstStyle/>
           <a:p>
             <a:pPr marL="342900" indent="-342900">
+              <a:lnSpc>
+                <a:spcPct val="130000"/>
+              </a:lnSpc>
               <a:buSzPct val="100000"/>
               <a:buChar char="•"/>
             </a:pPr>
             <a:r>
               <a:rPr lang="en-US" sz="1400" dirty="0">
                 <a:solidFill>
-                  <a:srgbClr val="334155"/>
-                </a:solidFill>
-                <a:latin typeface="Calibri" pitchFamily="34" charset="0"/>
-                <a:ea typeface="Calibri" pitchFamily="34" charset="-122"/>
-                <a:cs typeface="Calibri" pitchFamily="34" charset="-120"/>
-              </a:rPr>
-              <a:t>C'est le principe 'Program to an interface, not an implementation'</a:t>
+                  <a:srgbClr val="E2E8F0"/>
+                </a:solidFill>
+                <a:latin typeface="Calibri" pitchFamily="34" charset="0"/>
+                <a:ea typeface="Calibri" pitchFamily="34" charset="-122"/>
+                <a:cs typeface="Calibri" pitchFamily="34" charset="-120"/>
+              </a:rPr>
+              <a:t>Exemple : List&lt;E&gt; list = new ArrayList&lt;&gt;() ou new LinkedList&lt;&gt;()</a:t>
             </a:r>
             <a:endParaRPr lang="en-US" sz="1400" dirty="0"/>
           </a:p>
-        </p:txBody>
-      </p:sp>
-      <p:sp>
-        <p:nvSpPr>
-          <p:cNvPr id="9" name="Text 7"/>
-          <p:cNvSpPr/>
-          <p:nvPr/>
-        </p:nvSpPr>
-        <p:spPr>
-          <a:xfrm>
-            <a:off x="640080" y="3749040"/>
-            <a:ext cx="7772400" cy="457200"/>
-          </a:xfrm>
-          <a:prstGeom prst="rect">
-            <a:avLst/>
-          </a:prstGeom>
-          <a:noFill/>
-          <a:ln/>
-        </p:spPr>
-        <p:txBody>
-          <a:bodyPr wrap="square" rtlCol="0" anchor="ctr"/>
-          <a:lstStyle/>
           <a:p>
             <a:pPr marL="342900" indent="-342900">
+              <a:lnSpc>
+                <a:spcPct val="130000"/>
+              </a:lnSpc>
               <a:buSzPct val="100000"/>
               <a:buChar char="•"/>
             </a:pPr>
             <a:r>
               <a:rPr lang="en-US" sz="1400" dirty="0">
                 <a:solidFill>
-                  <a:srgbClr val="334155"/>
-                </a:solidFill>
-                <a:latin typeface="Calibri" pitchFamily="34" charset="0"/>
-                <a:ea typeface="Calibri" pitchFamily="34" charset="-122"/>
-                <a:cs typeface="Calibri" pitchFamily="34" charset="-120"/>
-              </a:rPr>
-              <a:t>C'est EXACTEMENT ce que fait l'ADT : définir l'interface, pas l'implémentation</a:t>
+                  <a:srgbClr val="E2E8F0"/>
+                </a:solidFill>
+                <a:latin typeface="Calibri" pitchFamily="34" charset="0"/>
+                <a:ea typeface="Calibri" pitchFamily="34" charset="-122"/>
+                <a:cs typeface="Calibri" pitchFamily="34" charset="-120"/>
+              </a:rPr>
+              <a:t>L'interface = le contrat ADT en Java</a:t>
             </a:r>
             <a:endParaRPr lang="en-US" sz="1400" dirty="0"/>
           </a:p>
@@ -2490,7 +2196,7 @@
     <p:bg>
       <p:bgPr>
         <a:solidFill>
-          <a:srgbClr val="0F172A"/>
+          <a:srgbClr val="1A1500"/>
         </a:solidFill>
       </p:bgPr>
     </p:bg>
@@ -2510,62 +2216,64 @@
       </p:grpSpPr>
       <p:sp>
         <p:nvSpPr>
-          <p:cNvPr id="2" name="Shape 0"/>
+          <p:cNvPr id="2" name="Text 0"/>
           <p:cNvSpPr/>
           <p:nvPr/>
         </p:nvSpPr>
         <p:spPr>
           <a:xfrm>
-            <a:off x="0" y="0"/>
-            <a:ext cx="9144000" cy="73152"/>
-          </a:xfrm>
-          <a:prstGeom prst="rect">
-            <a:avLst/>
+            <a:off x="548640" y="274320"/>
+            <a:ext cx="8229600" cy="548640"/>
+          </a:xfrm>
+          <a:prstGeom prst="rect">
+            <a:avLst/>
+          </a:prstGeom>
+          <a:noFill/>
+          <a:ln/>
+        </p:spPr>
+        <p:txBody>
+          <a:bodyPr wrap="square" rtlCol="0" anchor="ctr"/>
+          <a:lstStyle/>
+          <a:p>
+            <a:pPr indent="0" marL="0">
+              <a:buNone/>
+            </a:pPr>
+            <a:r>
+              <a:rPr lang="en-US" sz="2800" b="1" dirty="0">
+                <a:solidFill>
+                  <a:srgbClr val="FFFFFF"/>
+                </a:solidFill>
+                <a:latin typeface="Calibri" pitchFamily="34" charset="0"/>
+                <a:ea typeface="Calibri" pitchFamily="34" charset="-122"/>
+                <a:cs typeface="Calibri" pitchFamily="34" charset="-120"/>
+              </a:rPr>
+              <a:t>Récapitulatif</a:t>
+            </a:r>
+            <a:endParaRPr lang="en-US" sz="2800" dirty="0"/>
+          </a:p>
+        </p:txBody>
+      </p:sp>
+      <p:sp>
+        <p:nvSpPr>
+          <p:cNvPr id="3" name="Shape 1"/>
+          <p:cNvSpPr/>
+          <p:nvPr/>
+        </p:nvSpPr>
+        <p:spPr>
+          <a:xfrm>
+            <a:off x="548640" y="1097280"/>
+            <a:ext cx="2621280" cy="3200400"/>
+          </a:xfrm>
+          <a:prstGeom prst="roundRect">
+            <a:avLst>
+              <a:gd name="adj" fmla="val 3488"/>
+            </a:avLst>
           </a:prstGeom>
           <a:solidFill>
-            <a:srgbClr val="DC2626"/>
+            <a:srgbClr val="2D2400"/>
           </a:solidFill>
           <a:ln/>
         </p:spPr>
-      </p:sp>
-      <p:sp>
-        <p:nvSpPr>
-          <p:cNvPr id="3" name="Text 1"/>
-          <p:cNvSpPr/>
-          <p:nvPr/>
-        </p:nvSpPr>
-        <p:spPr>
-          <a:xfrm>
-            <a:off x="457200" y="182880"/>
-            <a:ext cx="7315200" cy="457200"/>
-          </a:xfrm>
-          <a:prstGeom prst="rect">
-            <a:avLst/>
-          </a:prstGeom>
-          <a:noFill/>
-          <a:ln/>
-        </p:spPr>
-        <p:txBody>
-          <a:bodyPr wrap="square" rtlCol="0" anchor="ctr"/>
-          <a:lstStyle/>
-          <a:p>
-            <a:pPr indent="0" marL="0">
-              <a:buNone/>
-            </a:pPr>
-            <a:r>
-              <a:rPr lang="en-US" sz="2200" b="1" dirty="0">
-                <a:solidFill>
-                  <a:srgbClr val="DC2626"/>
-                </a:solidFill>
-                <a:latin typeface="Trebuchet MS" pitchFamily="34" charset="0"/>
-                <a:ea typeface="Trebuchet MS" pitchFamily="34" charset="-122"/>
-                <a:cs typeface="Trebuchet MS" pitchFamily="34" charset="-120"/>
-              </a:rPr>
-              <a:t>NOTES ENSEIGNANT — Ch.14/15 M5/D4 Trade-offs</a:t>
-            </a:r>
-            <a:endParaRPr lang="en-US" sz="2200" dirty="0"/>
-          </a:p>
-        </p:txBody>
       </p:sp>
       <p:sp>
         <p:nvSpPr>
@@ -2575,8 +2283,8 @@
         </p:nvSpPr>
         <p:spPr>
           <a:xfrm>
-            <a:off x="457200" y="731520"/>
-            <a:ext cx="8229600" cy="4114800"/>
+            <a:off x="548640" y="1280160"/>
+            <a:ext cx="2621280" cy="457200"/>
           </a:xfrm>
           <a:prstGeom prst="rect">
             <a:avLst/>
@@ -2588,194 +2296,368 @@
           <a:bodyPr wrap="square" rtlCol="0" anchor="ctr"/>
           <a:lstStyle/>
           <a:p>
-            <a:pPr indent="0" marL="0">
+            <a:pPr algn="ctr" indent="0" marL="0">
               <a:buNone/>
             </a:pPr>
             <a:r>
-              <a:rPr lang="en-US" sz="1500" b="1" dirty="0">
-                <a:solidFill>
-                  <a:srgbClr val="00A896"/>
-                </a:solidFill>
-                <a:latin typeface="Trebuchet MS" pitchFamily="34" charset="0"/>
-                <a:ea typeface="Trebuchet MS" pitchFamily="34" charset="-122"/>
-                <a:cs typeface="Trebuchet MS" pitchFamily="34" charset="-120"/>
-              </a:rPr>
-              <a:t>Plan de séance :</a:t>
-            </a:r>
-            <a:endParaRPr lang="en-US" sz="1500" dirty="0"/>
-          </a:p>
-          <a:p>
-            <a:pPr indent="0" marL="0">
+              <a:rPr lang="en-US" sz="2800" dirty="0">
+                <a:solidFill>
+                  <a:srgbClr val="000000"/>
+                </a:solidFill>
+              </a:rPr>
+              <a:t>⚖️</a:t>
+            </a:r>
+            <a:endParaRPr lang="en-US" sz="2800" dirty="0"/>
+          </a:p>
+        </p:txBody>
+      </p:sp>
+      <p:sp>
+        <p:nvSpPr>
+          <p:cNvPr id="5" name="Text 3"/>
+          <p:cNvSpPr/>
+          <p:nvPr/>
+        </p:nvSpPr>
+        <p:spPr>
+          <a:xfrm>
+            <a:off x="685800" y="1828800"/>
+            <a:ext cx="2346960" cy="365760"/>
+          </a:xfrm>
+          <a:prstGeom prst="rect">
+            <a:avLst/>
+          </a:prstGeom>
+          <a:noFill/>
+          <a:ln/>
+        </p:spPr>
+        <p:txBody>
+          <a:bodyPr wrap="square" rtlCol="0" anchor="ctr"/>
+          <a:lstStyle/>
+          <a:p>
+            <a:pPr algn="ctr" indent="0" marL="0">
               <a:buNone/>
             </a:pPr>
-            <a:endParaRPr lang="en-US" sz="1500" dirty="0"/>
-          </a:p>
-          <a:p>
-            <a:pPr marL="342900" indent="-342900">
-              <a:buSzPct val="100000"/>
-              <a:buChar char="•"/>
-            </a:pPr>
-            <a:r>
-              <a:rPr lang="en-US" sz="1200" dirty="0">
-                <a:solidFill>
-                  <a:srgbClr val="E2E8F0"/>
-                </a:solidFill>
-                <a:latin typeface="Calibri" pitchFamily="34" charset="0"/>
-                <a:ea typeface="Calibri" pitchFamily="34" charset="-122"/>
-                <a:cs typeface="Calibri" pitchFamily="34" charset="-120"/>
-              </a:rPr>
-              <a:t>P1 : Trade-offs — exemples concrets pour chaque type</a:t>
-            </a:r>
-            <a:endParaRPr lang="en-US" sz="1500" dirty="0"/>
-          </a:p>
-          <a:p>
-            <a:pPr marL="342900" indent="-342900">
-              <a:buSzPct val="100000"/>
-              <a:buChar char="•"/>
-            </a:pPr>
-            <a:r>
-              <a:rPr lang="en-US" sz="1200" dirty="0">
-                <a:solidFill>
-                  <a:srgbClr val="E2E8F0"/>
-                </a:solidFill>
-                <a:latin typeface="Calibri" pitchFamily="34" charset="0"/>
-                <a:ea typeface="Calibri" pitchFamily="34" charset="-122"/>
-                <a:cs typeface="Calibri" pitchFamily="34" charset="-120"/>
-              </a:rPr>
-              <a:t>P2 : Indépendance d'implémentation — montrer un changement transparent</a:t>
-            </a:r>
-            <a:endParaRPr lang="en-US" sz="1500" dirty="0"/>
-          </a:p>
-          <a:p>
-            <a:pPr marL="342900" indent="-342900">
-              <a:buSzPct val="100000"/>
-              <a:buChar char="•"/>
-            </a:pPr>
-            <a:r>
-              <a:rPr lang="en-US" sz="1200" dirty="0">
-                <a:solidFill>
-                  <a:srgbClr val="E2E8F0"/>
-                </a:solidFill>
-                <a:latin typeface="Calibri" pitchFamily="34" charset="0"/>
-                <a:ea typeface="Calibri" pitchFamily="34" charset="-122"/>
-                <a:cs typeface="Calibri" pitchFamily="34" charset="-120"/>
-              </a:rPr>
-              <a:t>P3 : Mini-jeu (quiz trade-offs) + discussion en classe</a:t>
-            </a:r>
-            <a:endParaRPr lang="en-US" sz="1500" dirty="0"/>
-          </a:p>
-          <a:p>
-            <a:pPr marL="342900" indent="-342900">
-              <a:buSzPct val="100000"/>
-              <a:buChar char="•"/>
-            </a:pPr>
-            <a:r>
-              <a:rPr lang="en-US" sz="1200" dirty="0">
-                <a:solidFill>
-                  <a:srgbClr val="E2E8F0"/>
-                </a:solidFill>
-                <a:latin typeface="Calibri" pitchFamily="34" charset="0"/>
-                <a:ea typeface="Calibri" pitchFamily="34" charset="-122"/>
-                <a:cs typeface="Calibri" pitchFamily="34" charset="-120"/>
-              </a:rPr>
-              <a:t>P4 : Exercice de rédaction : argumenter 3 avantages avec exemples</a:t>
-            </a:r>
-            <a:endParaRPr lang="en-US" sz="1500" dirty="0"/>
-          </a:p>
-          <a:p>
-            <a:pPr indent="0" marL="0">
+            <a:r>
+              <a:rPr lang="en-US" sz="1300" b="1" dirty="0">
+                <a:solidFill>
+                  <a:srgbClr val="D97706"/>
+                </a:solidFill>
+                <a:latin typeface="Calibri" pitchFamily="34" charset="0"/>
+                <a:ea typeface="Calibri" pitchFamily="34" charset="-122"/>
+                <a:cs typeface="Calibri" pitchFamily="34" charset="-120"/>
+              </a:rPr>
+              <a:t>Trade-off</a:t>
+            </a:r>
+            <a:endParaRPr lang="en-US" sz="1300" dirty="0"/>
+          </a:p>
+        </p:txBody>
+      </p:sp>
+      <p:sp>
+        <p:nvSpPr>
+          <p:cNvPr id="6" name="Text 4"/>
+          <p:cNvSpPr/>
+          <p:nvPr/>
+        </p:nvSpPr>
+        <p:spPr>
+          <a:xfrm>
+            <a:off x="685800" y="2286000"/>
+            <a:ext cx="2346960" cy="1828800"/>
+          </a:xfrm>
+          <a:prstGeom prst="rect">
+            <a:avLst/>
+          </a:prstGeom>
+          <a:noFill/>
+          <a:ln/>
+        </p:spPr>
+        <p:txBody>
+          <a:bodyPr wrap="square" rtlCol="0" anchor="t"/>
+          <a:lstStyle/>
+          <a:p>
+            <a:pPr algn="ctr" indent="0" marL="0">
               <a:buNone/>
             </a:pPr>
-            <a:endParaRPr lang="en-US" sz="1500" dirty="0"/>
-          </a:p>
-          <a:p>
-            <a:pPr indent="0" marL="0">
+            <a:r>
+              <a:rPr lang="en-US" sz="1100" dirty="0">
+                <a:solidFill>
+                  <a:srgbClr val="94A3B8"/>
+                </a:solidFill>
+                <a:latin typeface="Calibri" pitchFamily="34" charset="0"/>
+                <a:ea typeface="Calibri" pitchFamily="34" charset="-122"/>
+                <a:cs typeface="Calibri" pitchFamily="34" charset="-120"/>
+              </a:rPr>
+              <a:t>Temps vs Espace — choisir selon les contraintes</a:t>
+            </a:r>
+            <a:endParaRPr lang="en-US" sz="1100" dirty="0"/>
+          </a:p>
+        </p:txBody>
+      </p:sp>
+      <p:sp>
+        <p:nvSpPr>
+          <p:cNvPr id="7" name="Shape 5"/>
+          <p:cNvSpPr/>
+          <p:nvPr/>
+        </p:nvSpPr>
+        <p:spPr>
+          <a:xfrm>
+            <a:off x="3352800" y="1097280"/>
+            <a:ext cx="2621280" cy="3200400"/>
+          </a:xfrm>
+          <a:prstGeom prst="roundRect">
+            <a:avLst>
+              <a:gd name="adj" fmla="val 3488"/>
+            </a:avLst>
+          </a:prstGeom>
+          <a:solidFill>
+            <a:srgbClr val="2D2400"/>
+          </a:solidFill>
+          <a:ln/>
+        </p:spPr>
+      </p:sp>
+      <p:sp>
+        <p:nvSpPr>
+          <p:cNvPr id="8" name="Text 6"/>
+          <p:cNvSpPr/>
+          <p:nvPr/>
+        </p:nvSpPr>
+        <p:spPr>
+          <a:xfrm>
+            <a:off x="3352800" y="1280160"/>
+            <a:ext cx="2621280" cy="457200"/>
+          </a:xfrm>
+          <a:prstGeom prst="rect">
+            <a:avLst/>
+          </a:prstGeom>
+          <a:noFill/>
+          <a:ln/>
+        </p:spPr>
+        <p:txBody>
+          <a:bodyPr wrap="square" rtlCol="0" anchor="ctr"/>
+          <a:lstStyle/>
+          <a:p>
+            <a:pPr algn="ctr" indent="0" marL="0">
               <a:buNone/>
             </a:pPr>
             <a:r>
-              <a:rPr lang="en-US" sz="1400" b="1" dirty="0">
-                <a:solidFill>
-                  <a:srgbClr val="F97316"/>
-                </a:solidFill>
-                <a:latin typeface="Calibri" pitchFamily="34" charset="0"/>
-                <a:ea typeface="Calibri" pitchFamily="34" charset="-122"/>
-                <a:cs typeface="Calibri" pitchFamily="34" charset="-120"/>
-              </a:rPr>
-              <a:t>Critère M5/D4 — l'étudiant doit :</a:t>
-            </a:r>
-            <a:endParaRPr lang="en-US" sz="1500" dirty="0"/>
-          </a:p>
-          <a:p>
-            <a:pPr marL="342900" indent="-342900">
-              <a:buSzPct val="100000"/>
-              <a:buChar char="•"/>
-            </a:pPr>
-            <a:r>
-              <a:rPr lang="en-US" sz="1200" dirty="0">
-                <a:solidFill>
-                  <a:srgbClr val="E2E8F0"/>
-                </a:solidFill>
-                <a:latin typeface="Calibri" pitchFamily="34" charset="0"/>
-                <a:ea typeface="Calibri" pitchFamily="34" charset="-122"/>
-                <a:cs typeface="Calibri" pitchFamily="34" charset="-120"/>
-              </a:rPr>
-              <a:t>M5 : Expliquer un trade-off avec un exemple concret de choix d'ADT</a:t>
-            </a:r>
-            <a:endParaRPr lang="en-US" sz="1500" dirty="0"/>
-          </a:p>
-          <a:p>
-            <a:pPr marL="342900" indent="-342900">
-              <a:buSzPct val="100000"/>
-              <a:buChar char="•"/>
-            </a:pPr>
-            <a:r>
-              <a:rPr lang="en-US" sz="1200" dirty="0">
-                <a:solidFill>
-                  <a:srgbClr val="E2E8F0"/>
-                </a:solidFill>
-                <a:latin typeface="Calibri" pitchFamily="34" charset="0"/>
-                <a:ea typeface="Calibri" pitchFamily="34" charset="-122"/>
-                <a:cs typeface="Calibri" pitchFamily="34" charset="-120"/>
-              </a:rPr>
-              <a:t>D4 : Évaluer 3 avantages distincts de l'indépendance d'implémentation</a:t>
-            </a:r>
-            <a:endParaRPr lang="en-US" sz="1500" dirty="0"/>
-          </a:p>
-          <a:p>
-            <a:pPr marL="342900" indent="-342900">
-              <a:buSzPct val="100000"/>
-              <a:buChar char="•"/>
-            </a:pPr>
-            <a:r>
-              <a:rPr lang="en-US" sz="1200" dirty="0">
-                <a:solidFill>
-                  <a:srgbClr val="E2E8F0"/>
-                </a:solidFill>
-                <a:latin typeface="Calibri" pitchFamily="34" charset="0"/>
-                <a:ea typeface="Calibri" pitchFamily="34" charset="-122"/>
-                <a:cs typeface="Calibri" pitchFamily="34" charset="-120"/>
-              </a:rPr>
-              <a:t>D4 : Chaque avantage doit être illustré avec un exemple Java</a:t>
-            </a:r>
-            <a:endParaRPr lang="en-US" sz="1500" dirty="0"/>
-          </a:p>
-          <a:p>
-            <a:pPr marL="342900" indent="-342900">
-              <a:buSzPct val="100000"/>
-              <a:buChar char="•"/>
-            </a:pPr>
-            <a:r>
-              <a:rPr lang="en-US" sz="1200" dirty="0">
-                <a:solidFill>
-                  <a:srgbClr val="E2E8F0"/>
-                </a:solidFill>
-                <a:latin typeface="Calibri" pitchFamily="34" charset="0"/>
-                <a:ea typeface="Calibri" pitchFamily="34" charset="-122"/>
-                <a:cs typeface="Calibri" pitchFamily="34" charset="-120"/>
-              </a:rPr>
-              <a:t>Lier au principe 'program to an interface' et montrer le code</a:t>
-            </a:r>
-            <a:endParaRPr lang="en-US" sz="1500" dirty="0"/>
+              <a:rPr lang="en-US" sz="2800" dirty="0">
+                <a:solidFill>
+                  <a:srgbClr val="000000"/>
+                </a:solidFill>
+              </a:rPr>
+              <a:t>📊</a:t>
+            </a:r>
+            <a:endParaRPr lang="en-US" sz="2800" dirty="0"/>
+          </a:p>
+        </p:txBody>
+      </p:sp>
+      <p:sp>
+        <p:nvSpPr>
+          <p:cNvPr id="9" name="Text 7"/>
+          <p:cNvSpPr/>
+          <p:nvPr/>
+        </p:nvSpPr>
+        <p:spPr>
+          <a:xfrm>
+            <a:off x="3489960" y="1828800"/>
+            <a:ext cx="2346960" cy="365760"/>
+          </a:xfrm>
+          <a:prstGeom prst="rect">
+            <a:avLst/>
+          </a:prstGeom>
+          <a:noFill/>
+          <a:ln/>
+        </p:spPr>
+        <p:txBody>
+          <a:bodyPr wrap="square" rtlCol="0" anchor="ctr"/>
+          <a:lstStyle/>
+          <a:p>
+            <a:pPr algn="ctr" indent="0" marL="0">
+              <a:buNone/>
+            </a:pPr>
+            <a:r>
+              <a:rPr lang="en-US" sz="1300" b="1" dirty="0">
+                <a:solidFill>
+                  <a:srgbClr val="D97706"/>
+                </a:solidFill>
+                <a:latin typeface="Calibri" pitchFamily="34" charset="0"/>
+                <a:ea typeface="Calibri" pitchFamily="34" charset="-122"/>
+                <a:cs typeface="Calibri" pitchFamily="34" charset="-120"/>
+              </a:rPr>
+              <a:t>Benchmark</a:t>
+            </a:r>
+            <a:endParaRPr lang="en-US" sz="1300" dirty="0"/>
+          </a:p>
+        </p:txBody>
+      </p:sp>
+      <p:sp>
+        <p:nvSpPr>
+          <p:cNvPr id="10" name="Text 8"/>
+          <p:cNvSpPr/>
+          <p:nvPr/>
+        </p:nvSpPr>
+        <p:spPr>
+          <a:xfrm>
+            <a:off x="3489960" y="2286000"/>
+            <a:ext cx="2346960" cy="1828800"/>
+          </a:xfrm>
+          <a:prstGeom prst="rect">
+            <a:avLst/>
+          </a:prstGeom>
+          <a:noFill/>
+          <a:ln/>
+        </p:spPr>
+        <p:txBody>
+          <a:bodyPr wrap="square" rtlCol="0" anchor="t"/>
+          <a:lstStyle/>
+          <a:p>
+            <a:pPr algn="ctr" indent="0" marL="0">
+              <a:buNone/>
+            </a:pPr>
+            <a:r>
+              <a:rPr lang="en-US" sz="1100" dirty="0">
+                <a:solidFill>
+                  <a:srgbClr val="94A3B8"/>
+                </a:solidFill>
+                <a:latin typeface="Calibri" pitchFamily="34" charset="0"/>
+                <a:ea typeface="Calibri" pitchFamily="34" charset="-122"/>
+                <a:cs typeface="Calibri" pitchFamily="34" charset="-120"/>
+              </a:rPr>
+              <a:t>Mesurer pour vérifier les prédictions Big O</a:t>
+            </a:r>
+            <a:endParaRPr lang="en-US" sz="1100" dirty="0"/>
+          </a:p>
+        </p:txBody>
+      </p:sp>
+      <p:sp>
+        <p:nvSpPr>
+          <p:cNvPr id="11" name="Shape 9"/>
+          <p:cNvSpPr/>
+          <p:nvPr/>
+        </p:nvSpPr>
+        <p:spPr>
+          <a:xfrm>
+            <a:off x="6156960" y="1097280"/>
+            <a:ext cx="2621280" cy="3200400"/>
+          </a:xfrm>
+          <a:prstGeom prst="roundRect">
+            <a:avLst>
+              <a:gd name="adj" fmla="val 3488"/>
+            </a:avLst>
+          </a:prstGeom>
+          <a:solidFill>
+            <a:srgbClr val="2D2400"/>
+          </a:solidFill>
+          <a:ln/>
+        </p:spPr>
+      </p:sp>
+      <p:sp>
+        <p:nvSpPr>
+          <p:cNvPr id="12" name="Text 10"/>
+          <p:cNvSpPr/>
+          <p:nvPr/>
+        </p:nvSpPr>
+        <p:spPr>
+          <a:xfrm>
+            <a:off x="6156960" y="1280160"/>
+            <a:ext cx="2621280" cy="457200"/>
+          </a:xfrm>
+          <a:prstGeom prst="rect">
+            <a:avLst/>
+          </a:prstGeom>
+          <a:noFill/>
+          <a:ln/>
+        </p:spPr>
+        <p:txBody>
+          <a:bodyPr wrap="square" rtlCol="0" anchor="ctr"/>
+          <a:lstStyle/>
+          <a:p>
+            <a:pPr algn="ctr" indent="0" marL="0">
+              <a:buNone/>
+            </a:pPr>
+            <a:r>
+              <a:rPr lang="en-US" sz="2800" dirty="0">
+                <a:solidFill>
+                  <a:srgbClr val="000000"/>
+                </a:solidFill>
+              </a:rPr>
+              <a:t>🔌</a:t>
+            </a:r>
+            <a:endParaRPr lang="en-US" sz="2800" dirty="0"/>
+          </a:p>
+        </p:txBody>
+      </p:sp>
+      <p:sp>
+        <p:nvSpPr>
+          <p:cNvPr id="13" name="Text 11"/>
+          <p:cNvSpPr/>
+          <p:nvPr/>
+        </p:nvSpPr>
+        <p:spPr>
+          <a:xfrm>
+            <a:off x="6294120" y="1828800"/>
+            <a:ext cx="2346960" cy="365760"/>
+          </a:xfrm>
+          <a:prstGeom prst="rect">
+            <a:avLst/>
+          </a:prstGeom>
+          <a:noFill/>
+          <a:ln/>
+        </p:spPr>
+        <p:txBody>
+          <a:bodyPr wrap="square" rtlCol="0" anchor="ctr"/>
+          <a:lstStyle/>
+          <a:p>
+            <a:pPr algn="ctr" indent="0" marL="0">
+              <a:buNone/>
+            </a:pPr>
+            <a:r>
+              <a:rPr lang="en-US" sz="1300" b="1" dirty="0">
+                <a:solidFill>
+                  <a:srgbClr val="D97706"/>
+                </a:solidFill>
+                <a:latin typeface="Calibri" pitchFamily="34" charset="0"/>
+                <a:ea typeface="Calibri" pitchFamily="34" charset="-122"/>
+                <a:cs typeface="Calibri" pitchFamily="34" charset="-120"/>
+              </a:rPr>
+              <a:t>Indépendance</a:t>
+            </a:r>
+            <a:endParaRPr lang="en-US" sz="1300" dirty="0"/>
+          </a:p>
+        </p:txBody>
+      </p:sp>
+      <p:sp>
+        <p:nvSpPr>
+          <p:cNvPr id="14" name="Text 12"/>
+          <p:cNvSpPr/>
+          <p:nvPr/>
+        </p:nvSpPr>
+        <p:spPr>
+          <a:xfrm>
+            <a:off x="6294120" y="2286000"/>
+            <a:ext cx="2346960" cy="1828800"/>
+          </a:xfrm>
+          <a:prstGeom prst="rect">
+            <a:avLst/>
+          </a:prstGeom>
+          <a:noFill/>
+          <a:ln/>
+        </p:spPr>
+        <p:txBody>
+          <a:bodyPr wrap="square" rtlCol="0" anchor="t"/>
+          <a:lstStyle/>
+          <a:p>
+            <a:pPr algn="ctr" indent="0" marL="0">
+              <a:buNone/>
+            </a:pPr>
+            <a:r>
+              <a:rPr lang="en-US" sz="1100" dirty="0">
+                <a:solidFill>
+                  <a:srgbClr val="94A3B8"/>
+                </a:solidFill>
+                <a:latin typeface="Calibri" pitchFamily="34" charset="0"/>
+                <a:ea typeface="Calibri" pitchFamily="34" charset="-122"/>
+                <a:cs typeface="Calibri" pitchFamily="34" charset="-120"/>
+              </a:rPr>
+              <a:t>3 bénéfices : flexibilité, testabilité, réutilisabilité</a:t>
+            </a:r>
+            <a:endParaRPr lang="en-US" sz="1100" dirty="0"/>
           </a:p>
         </p:txBody>
       </p:sp>
